--- a/DBX_Metadata_Ingestion.pptx
+++ b/DBX_Metadata_Ingestion.pptx
@@ -1067,7 +1067,7 @@
           <a:p>
             <a:fld id="{BE5C041E-626C-BF47-83B9-ECB64B83EC2B}" type="datetimeFigureOut">
               <a:rPr lang="en-US" smtClean="0"/>
-              <a:t>4/27/26</a:t>
+              <a:t>5/4/26</a:t>
             </a:fld>
             <a:endParaRPr lang="en-US"/>
           </a:p>
@@ -1266,7 +1266,7 @@
           <a:p>
             <a:fld id="{BE5C041E-626C-BF47-83B9-ECB64B83EC2B}" type="datetimeFigureOut">
               <a:rPr lang="en-US" smtClean="0"/>
-              <a:t>4/27/26</a:t>
+              <a:t>5/4/26</a:t>
             </a:fld>
             <a:endParaRPr lang="en-US"/>
           </a:p>
@@ -1475,7 +1475,7 @@
           <a:p>
             <a:fld id="{BE5C041E-626C-BF47-83B9-ECB64B83EC2B}" type="datetimeFigureOut">
               <a:rPr lang="en-US" smtClean="0"/>
-              <a:t>4/27/26</a:t>
+              <a:t>5/4/26</a:t>
             </a:fld>
             <a:endParaRPr lang="en-US"/>
           </a:p>
@@ -1709,7 +1709,7 @@
           <a:p>
             <a:fld id="{BE5C041E-626C-BF47-83B9-ECB64B83EC2B}" type="datetimeFigureOut">
               <a:rPr lang="en-US" smtClean="0"/>
-              <a:t>4/27/26</a:t>
+              <a:t>5/4/26</a:t>
             </a:fld>
             <a:endParaRPr lang="en-US"/>
           </a:p>
@@ -1985,7 +1985,7 @@
           <a:p>
             <a:fld id="{BE5C041E-626C-BF47-83B9-ECB64B83EC2B}" type="datetimeFigureOut">
               <a:rPr lang="en-US" smtClean="0"/>
-              <a:t>4/27/26</a:t>
+              <a:t>5/4/26</a:t>
             </a:fld>
             <a:endParaRPr lang="en-US"/>
           </a:p>
@@ -2251,7 +2251,7 @@
           <a:p>
             <a:fld id="{BE5C041E-626C-BF47-83B9-ECB64B83EC2B}" type="datetimeFigureOut">
               <a:rPr lang="en-US" smtClean="0"/>
-              <a:t>4/27/26</a:t>
+              <a:t>5/4/26</a:t>
             </a:fld>
             <a:endParaRPr lang="en-US"/>
           </a:p>
@@ -2664,7 +2664,7 @@
           <a:p>
             <a:fld id="{BE5C041E-626C-BF47-83B9-ECB64B83EC2B}" type="datetimeFigureOut">
               <a:rPr lang="en-US" smtClean="0"/>
-              <a:t>4/27/26</a:t>
+              <a:t>5/4/26</a:t>
             </a:fld>
             <a:endParaRPr lang="en-US"/>
           </a:p>
@@ -2806,7 +2806,7 @@
           <a:p>
             <a:fld id="{BE5C041E-626C-BF47-83B9-ECB64B83EC2B}" type="datetimeFigureOut">
               <a:rPr lang="en-US" smtClean="0"/>
-              <a:t>4/27/26</a:t>
+              <a:t>5/4/26</a:t>
             </a:fld>
             <a:endParaRPr lang="en-US"/>
           </a:p>
@@ -2920,7 +2920,7 @@
           <a:p>
             <a:fld id="{BE5C041E-626C-BF47-83B9-ECB64B83EC2B}" type="datetimeFigureOut">
               <a:rPr lang="en-US" smtClean="0"/>
-              <a:t>4/27/26</a:t>
+              <a:t>5/4/26</a:t>
             </a:fld>
             <a:endParaRPr lang="en-US"/>
           </a:p>
@@ -3232,7 +3232,7 @@
           <a:p>
             <a:fld id="{BE5C041E-626C-BF47-83B9-ECB64B83EC2B}" type="datetimeFigureOut">
               <a:rPr lang="en-US" smtClean="0"/>
-              <a:t>4/27/26</a:t>
+              <a:t>5/4/26</a:t>
             </a:fld>
             <a:endParaRPr lang="en-US"/>
           </a:p>
@@ -3521,7 +3521,7 @@
           <a:p>
             <a:fld id="{BE5C041E-626C-BF47-83B9-ECB64B83EC2B}" type="datetimeFigureOut">
               <a:rPr lang="en-US" smtClean="0"/>
-              <a:t>4/27/26</a:t>
+              <a:t>5/4/26</a:t>
             </a:fld>
             <a:endParaRPr lang="en-US"/>
           </a:p>
@@ -3763,7 +3763,7 @@
           <a:p>
             <a:fld id="{BE5C041E-626C-BF47-83B9-ECB64B83EC2B}" type="datetimeFigureOut">
               <a:rPr lang="en-US" smtClean="0"/>
-              <a:t>4/27/26</a:t>
+              <a:t>5/4/26</a:t>
             </a:fld>
             <a:endParaRPr lang="en-US"/>
           </a:p>
@@ -5338,31 +5338,6 @@
       </p:grpSpPr>
       <p:pic>
         <p:nvPicPr>
-          <p:cNvPr id="2" name="Image 0" descr="/home/claude/lovelytics_unpacked/ppt/media/image13.png"/>
-          <p:cNvPicPr>
-            <a:picLocks noChangeAspect="1"/>
-          </p:cNvPicPr>
-          <p:nvPr/>
-        </p:nvPicPr>
-        <p:blipFill>
-          <a:blip r:embed="rId3"/>
-          <a:stretch>
-            <a:fillRect/>
-          </a:stretch>
-        </p:blipFill>
-        <p:spPr>
-          <a:xfrm>
-            <a:off x="0" y="10450"/>
-            <a:ext cx="9144000" cy="5143500"/>
-          </a:xfrm>
-          <a:prstGeom prst="rect">
-            <a:avLst/>
-          </a:prstGeom>
-          <a:noFill/>
-        </p:spPr>
-      </p:pic>
-      <p:pic>
-        <p:nvPicPr>
           <p:cNvPr id="3" name="Image 1" descr="/home/claude/lovelytics_unpacked/ppt/media/image15.png"/>
           <p:cNvPicPr>
             <a:picLocks noChangeAspect="1"/>
@@ -5370,7 +5345,7 @@
           <p:nvPr/>
         </p:nvPicPr>
         <p:blipFill>
-          <a:blip r:embed="rId4"/>
+          <a:blip r:embed="rId3"/>
           <a:stretch>
             <a:fillRect/>
           </a:stretch>
@@ -6597,6 +6572,68 @@
               <a:t>3</a:t>
             </a:r>
             <a:endParaRPr lang="en-US" sz="900" dirty="0"/>
+          </a:p>
+        </p:txBody>
+      </p:sp>
+      <p:sp>
+        <p:nvSpPr>
+          <p:cNvPr id="40" name="Shape 3">
+            <a:extLst>
+              <a:ext uri="{FF2B5EF4-FFF2-40B4-BE49-F238E27FC236}">
+                <a16:creationId xmlns:a16="http://schemas.microsoft.com/office/drawing/2014/main" id="{B16AB19E-27B2-BD3E-EA04-DF2EB8723115}"/>
+              </a:ext>
+            </a:extLst>
+          </p:cNvPr>
+          <p:cNvSpPr/>
+          <p:nvPr/>
+        </p:nvSpPr>
+        <p:spPr>
+          <a:xfrm>
+            <a:off x="3273552" y="2880360"/>
+            <a:ext cx="2651760" cy="658368"/>
+          </a:xfrm>
+          <a:prstGeom prst="rect">
+            <a:avLst/>
+          </a:prstGeom>
+          <a:solidFill>
+            <a:srgbClr val="156082"/>
+          </a:solidFill>
+          <a:ln w="25400">
+            <a:solidFill>
+              <a:srgbClr val="1DB89A"/>
+            </a:solidFill>
+            <a:prstDash val="solid"/>
+          </a:ln>
+        </p:spPr>
+        <p:txBody>
+          <a:bodyPr/>
+          <a:lstStyle/>
+          <a:p>
+            <a:endParaRPr lang="en-US" sz="1300" b="1" dirty="0">
+              <a:solidFill>
+                <a:srgbClr val="FFFFFF"/>
+              </a:solidFill>
+              <a:latin typeface="Courier New" pitchFamily="34" charset="0"/>
+              <a:ea typeface="Courier New" pitchFamily="34" charset="-122"/>
+              <a:cs typeface="Courier New" pitchFamily="34" charset="-120"/>
+            </a:endParaRPr>
+          </a:p>
+          <a:p>
+            <a:r>
+              <a:rPr lang="en-US" sz="1300" b="1" dirty="0" err="1">
+                <a:solidFill>
+                  <a:srgbClr val="FFFFFF"/>
+                </a:solidFill>
+                <a:latin typeface="Courier New" pitchFamily="34" charset="0"/>
+                <a:ea typeface="Courier New" pitchFamily="34" charset="-122"/>
+                <a:cs typeface="Courier New" pitchFamily="34" charset="-120"/>
+              </a:rPr>
+              <a:t>source_connection_config</a:t>
+            </a:r>
+            <a:endParaRPr lang="en-US" sz="1300" dirty="0"/>
+          </a:p>
+          <a:p>
+            <a:endParaRPr lang="en-US" dirty="0"/>
           </a:p>
         </p:txBody>
       </p:sp>
@@ -8523,7 +8560,7 @@
                 <a:ea typeface="Calibri" pitchFamily="34" charset="-122"/>
                 <a:cs typeface="Calibri" pitchFamily="34" charset="-120"/>
               </a:rPr>
-              <a:t>Six Connection Types</a:t>
+              <a:t>Connection Types</a:t>
             </a:r>
             <a:endParaRPr lang="en-US" sz="3200" dirty="0"/>
           </a:p>
@@ -9837,7 +9874,7 @@
         </p:nvSpPr>
         <p:spPr>
           <a:xfrm>
-            <a:off x="4773168" y="3694176"/>
+            <a:off x="4773168" y="3712464"/>
             <a:ext cx="4251960" cy="1152144"/>
           </a:xfrm>
           <a:prstGeom prst="rect">
@@ -9857,7 +9894,7 @@
           <a:bodyPr/>
           <a:lstStyle/>
           <a:p>
-            <a:endParaRPr lang="en-US"/>
+            <a:endParaRPr lang="en-US" dirty="0"/>
           </a:p>
         </p:txBody>
       </p:sp>
@@ -10016,21 +10053,12 @@
           <a:bodyPr wrap="square" lIns="0" tIns="0" rIns="0" bIns="0" rtlCol="0" anchor="ctr"/>
           <a:lstStyle/>
           <a:p>
-            <a:pPr marL="0" indent="0">
-              <a:buNone/>
-            </a:pPr>
-            <a:r>
-              <a:rPr lang="en-US" sz="1000" i="1" dirty="0">
-                <a:solidFill>
-                  <a:srgbClr val="156082"/>
-                </a:solidFill>
-                <a:latin typeface="Calibri" pitchFamily="34" charset="0"/>
-                <a:ea typeface="Calibri" pitchFamily="34" charset="-122"/>
-                <a:cs typeface="Calibri" pitchFamily="34" charset="-120"/>
+            <a:r>
+              <a:rPr lang="en-US" sz="1000" dirty="0">
+                <a:cs typeface="Calibri" panose="020F0502020204030204" pitchFamily="34" charset="0"/>
               </a:rPr>
-              <a:t>Each instance = one registry row</a:t>
-            </a:r>
-            <a:endParaRPr lang="en-US" sz="1000" dirty="0"/>
+              <a:t>Prod → staging refresh — same tables, different source instance</a:t>
+            </a:r>
           </a:p>
         </p:txBody>
       </p:sp>
@@ -13311,7 +13339,7 @@
                 <a:ea typeface="Calibri" pitchFamily="34" charset="-122"/>
                 <a:cs typeface="Calibri" pitchFamily="34" charset="-120"/>
               </a:rPr>
-              <a:t>8 tables</a:t>
+              <a:t>9 tables</a:t>
             </a:r>
             <a:endParaRPr lang="en-US" sz="1300" dirty="0"/>
           </a:p>
@@ -14430,30 +14458,6 @@
       </p:grpSpPr>
       <p:pic>
         <p:nvPicPr>
-          <p:cNvPr id="2" name="Image 0" descr="/home/claude/lovelytics_unpacked/ppt/media/image13.png"/>
-          <p:cNvPicPr>
-            <a:picLocks noChangeAspect="1"/>
-          </p:cNvPicPr>
-          <p:nvPr/>
-        </p:nvPicPr>
-        <p:blipFill>
-          <a:blip r:embed="rId3"/>
-          <a:stretch>
-            <a:fillRect/>
-          </a:stretch>
-        </p:blipFill>
-        <p:spPr>
-          <a:xfrm>
-            <a:off x="0" y="0"/>
-            <a:ext cx="9144000" cy="5143500"/>
-          </a:xfrm>
-          <a:prstGeom prst="rect">
-            <a:avLst/>
-          </a:prstGeom>
-        </p:spPr>
-      </p:pic>
-      <p:pic>
-        <p:nvPicPr>
           <p:cNvPr id="3" name="Image 1" descr="/home/claude/lovelytics_unpacked/ppt/media/image2.png"/>
           <p:cNvPicPr>
             <a:picLocks noChangeAspect="1"/>
@@ -14461,7 +14465,7 @@
           <p:nvPr/>
         </p:nvPicPr>
         <p:blipFill>
-          <a:blip r:embed="rId4">
+          <a:blip r:embed="rId3">
             <a:alphaModFix amt="45000"/>
           </a:blip>
           <a:stretch>
@@ -14487,7 +14491,7 @@
           <p:nvPr/>
         </p:nvPicPr>
         <p:blipFill>
-          <a:blip r:embed="rId5"/>
+          <a:blip r:embed="rId4"/>
           <a:stretch>
             <a:fillRect/>
           </a:stretch>
@@ -14510,7 +14514,7 @@
         </p:nvSpPr>
         <p:spPr>
           <a:xfrm>
-            <a:off x="365760" y="822960"/>
+            <a:off x="365760" y="804672"/>
             <a:ext cx="6858000" cy="914400"/>
           </a:xfrm>
           <a:prstGeom prst="rect">
@@ -14535,7 +14539,7 @@
                 <a:ea typeface="Calibri" pitchFamily="34" charset="-122"/>
                 <a:cs typeface="Calibri" pitchFamily="34" charset="-120"/>
               </a:rPr>
-              <a:t>One Config Table.</a:t>
+              <a:t>Two Config Tables.</a:t>
             </a:r>
             <a:endParaRPr lang="en-US" sz="4800" dirty="0"/>
           </a:p>
@@ -14549,7 +14553,7 @@
         </p:nvSpPr>
         <p:spPr>
           <a:xfrm>
-            <a:off x="365760" y="1719072"/>
+            <a:off x="365760" y="2241759"/>
             <a:ext cx="8229600" cy="658368"/>
           </a:xfrm>
           <a:prstGeom prst="rect">
@@ -14580,7 +14584,7 @@
           </a:p>
         </p:txBody>
       </p:sp>
-      <p:sp>
+      <p:sp useBgFill="1">
         <p:nvSpPr>
           <p:cNvPr id="7" name="Text 2"/>
           <p:cNvSpPr/>
@@ -14588,51 +14592,44 @@
         </p:nvSpPr>
         <p:spPr>
           <a:xfrm>
-            <a:off x="365760" y="2487168"/>
-            <a:ext cx="5943600" cy="658368"/>
-          </a:xfrm>
-          <a:prstGeom prst="rect">
-            <a:avLst/>
-          </a:prstGeom>
-          <a:noFill/>
+            <a:off x="502920" y="1655713"/>
+            <a:ext cx="5943600" cy="435124"/>
+          </a:xfrm>
+          <a:prstGeom prst="rect">
+            <a:avLst/>
+          </a:prstGeom>
           <a:ln/>
         </p:spPr>
         <p:txBody>
           <a:bodyPr wrap="square" lIns="0" tIns="0" rIns="0" bIns="0" rtlCol="0" anchor="ctr"/>
           <a:lstStyle/>
           <a:p>
-            <a:pPr marL="0" indent="0">
-              <a:buNone/>
+            <a:pPr marL="285750" indent="-285750">
+              <a:buFont typeface="Arial" panose="020B0604020202020204" pitchFamily="34" charset="0"/>
+              <a:buChar char="•"/>
             </a:pPr>
             <a:r>
               <a:rPr lang="en-US" sz="1400" dirty="0">
-                <a:solidFill>
-                  <a:srgbClr val="595959"/>
-                </a:solidFill>
-                <a:latin typeface="Calibri" pitchFamily="34" charset="0"/>
+                <a:cs typeface="Calibri" panose="020F0502020204030204" pitchFamily="34" charset="0"/>
+              </a:rPr>
+              <a:t>One to manage tables to be ingested</a:t>
+            </a:r>
+          </a:p>
+          <a:p>
+            <a:pPr marL="285750" indent="-285750">
+              <a:buFont typeface="Arial" panose="020B0604020202020204" pitchFamily="34" charset="0"/>
+              <a:buChar char="•"/>
+            </a:pPr>
+            <a:r>
+              <a:rPr lang="en-US" sz="1400" dirty="0">
                 <a:ea typeface="Calibri" pitchFamily="34" charset="-122"/>
-                <a:cs typeface="Calibri" pitchFamily="34" charset="-120"/>
+                <a:cs typeface="Calibri" panose="020F0502020204030204" pitchFamily="34" charset="0"/>
               </a:rPr>
-              <a:t>Add any source. Add any table. Change any load pattern.</a:t>
-            </a:r>
-            <a:endParaRPr lang="en-US" sz="1400" dirty="0"/>
-          </a:p>
-          <a:p>
-            <a:pPr marL="0" indent="0">
-              <a:buNone/>
-            </a:pPr>
-            <a:r>
-              <a:rPr lang="en-US" sz="1400" dirty="0">
-                <a:solidFill>
-                  <a:srgbClr val="595959"/>
-                </a:solidFill>
-                <a:latin typeface="Calibri" pitchFamily="34" charset="0"/>
-                <a:ea typeface="Calibri" pitchFamily="34" charset="-122"/>
-                <a:cs typeface="Calibri" pitchFamily="34" charset="-120"/>
-              </a:rPr>
-              <a:t>No code changes. Just SQL.</a:t>
-            </a:r>
-            <a:endParaRPr lang="en-US" sz="1400" dirty="0"/>
+              <a:t>One to manage multiple data source Connections</a:t>
+            </a:r>
+            <a:endParaRPr lang="en-US" sz="1400" dirty="0">
+              <a:cs typeface="Calibri" panose="020F0502020204030204" pitchFamily="34" charset="0"/>
+            </a:endParaRPr>
           </a:p>
         </p:txBody>
       </p:sp>
@@ -14644,7 +14641,7 @@
         </p:nvSpPr>
         <p:spPr>
           <a:xfrm>
-            <a:off x="502920" y="3310128"/>
+            <a:off x="502920" y="3544915"/>
             <a:ext cx="2286000" cy="960120"/>
           </a:xfrm>
           <a:prstGeom prst="rect">
@@ -14683,7 +14680,7 @@
         </p:nvSpPr>
         <p:spPr>
           <a:xfrm>
-            <a:off x="502920" y="4261104"/>
+            <a:off x="502920" y="4422739"/>
             <a:ext cx="2286000" cy="502920"/>
           </a:xfrm>
           <a:prstGeom prst="rect">
@@ -14739,7 +14736,7 @@
         </p:nvSpPr>
         <p:spPr>
           <a:xfrm>
-            <a:off x="3291840" y="3310128"/>
+            <a:off x="3291840" y="3544915"/>
             <a:ext cx="2286000" cy="960120"/>
           </a:xfrm>
           <a:prstGeom prst="rect">
@@ -14778,7 +14775,7 @@
         </p:nvSpPr>
         <p:spPr>
           <a:xfrm>
-            <a:off x="3291840" y="4261104"/>
+            <a:off x="3291840" y="4422739"/>
             <a:ext cx="2286000" cy="502920"/>
           </a:xfrm>
           <a:prstGeom prst="rect">
@@ -14834,7 +14831,7 @@
         </p:nvSpPr>
         <p:spPr>
           <a:xfrm>
-            <a:off x="6080760" y="3310128"/>
+            <a:off x="6080760" y="3544915"/>
             <a:ext cx="2286000" cy="960120"/>
           </a:xfrm>
           <a:prstGeom prst="rect">
@@ -14873,7 +14870,7 @@
         </p:nvSpPr>
         <p:spPr>
           <a:xfrm>
-            <a:off x="6080760" y="4261104"/>
+            <a:off x="6080760" y="4422739"/>
             <a:ext cx="2286000" cy="502920"/>
           </a:xfrm>
           <a:prstGeom prst="rect">
@@ -15021,6 +15018,68 @@
               <a:t>9</a:t>
             </a:r>
             <a:endParaRPr lang="en-US" sz="900" dirty="0"/>
+          </a:p>
+        </p:txBody>
+      </p:sp>
+      <p:sp>
+        <p:nvSpPr>
+          <p:cNvPr id="18" name="Text 2">
+            <a:extLst>
+              <a:ext uri="{FF2B5EF4-FFF2-40B4-BE49-F238E27FC236}">
+                <a16:creationId xmlns:a16="http://schemas.microsoft.com/office/drawing/2014/main" id="{63C42527-091F-6AC8-7BBA-FA32F8B3B0AE}"/>
+              </a:ext>
+            </a:extLst>
+          </p:cNvPr>
+          <p:cNvSpPr/>
+          <p:nvPr/>
+        </p:nvSpPr>
+        <p:spPr>
+          <a:xfrm>
+            <a:off x="518160" y="2968752"/>
+            <a:ext cx="5943600" cy="658368"/>
+          </a:xfrm>
+          <a:prstGeom prst="rect">
+            <a:avLst/>
+          </a:prstGeom>
+          <a:noFill/>
+          <a:ln/>
+        </p:spPr>
+        <p:txBody>
+          <a:bodyPr wrap="square" lIns="0" tIns="0" rIns="0" bIns="0" rtlCol="0" anchor="ctr"/>
+          <a:lstStyle/>
+          <a:p>
+            <a:pPr marL="0" indent="0">
+              <a:buNone/>
+            </a:pPr>
+            <a:r>
+              <a:rPr lang="en-US" sz="1400" b="1" dirty="0">
+                <a:solidFill>
+                  <a:srgbClr val="595959"/>
+                </a:solidFill>
+                <a:latin typeface="Calibri" pitchFamily="34" charset="0"/>
+                <a:ea typeface="Calibri" pitchFamily="34" charset="-122"/>
+                <a:cs typeface="Calibri" pitchFamily="34" charset="-120"/>
+              </a:rPr>
+              <a:t>Add any source. Add any table. Change any load pattern.</a:t>
+            </a:r>
+            <a:endParaRPr lang="en-US" sz="1400" b="1" dirty="0"/>
+          </a:p>
+          <a:p>
+            <a:pPr marL="0" indent="0">
+              <a:buNone/>
+            </a:pPr>
+            <a:r>
+              <a:rPr lang="en-US" sz="1400" b="1" dirty="0">
+                <a:solidFill>
+                  <a:srgbClr val="595959"/>
+                </a:solidFill>
+                <a:latin typeface="Calibri" pitchFamily="34" charset="0"/>
+                <a:ea typeface="Calibri" pitchFamily="34" charset="-122"/>
+                <a:cs typeface="Calibri" pitchFamily="34" charset="-120"/>
+              </a:rPr>
+              <a:t>No code changes. Just SQL.</a:t>
+            </a:r>
+            <a:endParaRPr lang="en-US" sz="1400" b="1" dirty="0"/>
           </a:p>
         </p:txBody>
       </p:sp>
